--- a/public/course-materials/pptx/Module-02-Sécurité-et-portefeuilles.pptx
+++ b/public/course-materials/pptx/Module-02-Sécurité-et-portefeuilles.pptx
@@ -2459,7 +2459,7 @@
     <p:bg>
       <p:bgPr>
         <a:solidFill>
-          <a:srgbClr val="0F1419"/>
+          <a:srgbClr val="0F1214"/>
         </a:solidFill>
       </p:bgPr>
     </p:bg>
@@ -2492,7 +2492,7 @@
             <a:avLst/>
           </a:prstGeom>
           <a:solidFill>
-            <a:srgbClr val="8B5CF6">
+            <a:srgbClr val="3B968F">
               <a:alpha val="8000"/>
             </a:srgbClr>
           </a:solidFill>
@@ -2514,7 +2514,7 @@
             <a:avLst/>
           </a:prstGeom>
           <a:solidFill>
-            <a:srgbClr val="8B5CF6">
+            <a:srgbClr val="3B968F">
               <a:alpha val="5000"/>
             </a:srgbClr>
           </a:solidFill>
@@ -2536,7 +2536,7 @@
             <a:avLst/>
           </a:prstGeom>
           <a:solidFill>
-            <a:srgbClr val="8B5CF6"/>
+            <a:srgbClr val="3B968F"/>
           </a:solidFill>
           <a:ln/>
         </p:spPr>
@@ -2592,7 +2592,7 @@
             <a:r>
               <a:rPr lang="en-US" sz="1300" b="1" spc="400" kern="0" dirty="0">
                 <a:solidFill>
-                  <a:srgbClr val="8B5CF6"/>
+                  <a:srgbClr val="3B968F"/>
                 </a:solidFill>
                 <a:latin typeface="Calibri" pitchFamily="34" charset="0"/>
                 <a:ea typeface="Calibri" pitchFamily="34" charset="-122"/>
@@ -2658,7 +2658,7 @@
             <a:avLst/>
           </a:prstGeom>
           <a:solidFill>
-            <a:srgbClr val="8B5CF6"/>
+            <a:srgbClr val="3B968F"/>
           </a:solidFill>
           <a:ln/>
         </p:spPr>
@@ -2690,7 +2690,7 @@
             <a:r>
               <a:rPr lang="en-US" sz="1100" spc="300" kern="0" dirty="0">
                 <a:solidFill>
-                  <a:srgbClr val="64748B"/>
+                  <a:srgbClr val="5B6672"/>
                 </a:solidFill>
                 <a:latin typeface="Calibri" pitchFamily="34" charset="0"/>
                 <a:ea typeface="Calibri" pitchFamily="34" charset="-122"/>
@@ -2729,7 +2729,7 @@
             <a:r>
               <a:rPr lang="en-US" sz="1100" dirty="0">
                 <a:solidFill>
-                  <a:srgbClr val="94A3B8"/>
+                  <a:srgbClr val="8994A0"/>
                 </a:solidFill>
                 <a:latin typeface="Calibri" pitchFamily="34" charset="0"/>
                 <a:ea typeface="Calibri" pitchFamily="34" charset="-122"/>
@@ -2755,7 +2755,7 @@
     <p:bg>
       <p:bgPr>
         <a:solidFill>
-          <a:srgbClr val="1A2332"/>
+          <a:srgbClr val="1A2026"/>
         </a:solidFill>
       </p:bgPr>
     </p:bg>
@@ -2824,7 +2824,7 @@
             <a:r>
               <a:rPr lang="en-US" sz="1200" b="1" spc="300" kern="0" dirty="0">
                 <a:solidFill>
-                  <a:srgbClr val="F59E0B"/>
+                  <a:srgbClr val="5BC1B8"/>
                 </a:solidFill>
                 <a:latin typeface="Calibri" pitchFamily="34" charset="0"/>
                 <a:ea typeface="Calibri" pitchFamily="34" charset="-122"/>
@@ -2892,7 +2892,7 @@
             </a:avLst>
           </a:prstGeom>
           <a:solidFill>
-            <a:srgbClr val="0F1419"/>
+            <a:srgbClr val="0F1214"/>
           </a:solidFill>
           <a:ln/>
         </p:spPr>
@@ -2914,7 +2914,7 @@
             </a:avLst>
           </a:prstGeom>
           <a:solidFill>
-            <a:srgbClr val="8B5CF6"/>
+            <a:srgbClr val="3B968F"/>
           </a:solidFill>
           <a:ln/>
         </p:spPr>
@@ -2928,7 +2928,7 @@
             <a:r>
               <a:rPr lang="en-US" sz="1500" b="1" dirty="0">
                 <a:solidFill>
-                  <a:srgbClr val="0F1419"/>
+                  <a:srgbClr val="0F1214"/>
                 </a:solidFill>
                 <a:latin typeface="Calibri" pitchFamily="34" charset="0"/>
                 <a:ea typeface="Calibri" pitchFamily="34" charset="-122"/>
@@ -2996,7 +2996,7 @@
             </a:avLst>
           </a:prstGeom>
           <a:solidFill>
-            <a:srgbClr val="0F1419"/>
+            <a:srgbClr val="0F1214"/>
           </a:solidFill>
           <a:ln/>
         </p:spPr>
@@ -3018,7 +3018,7 @@
             </a:avLst>
           </a:prstGeom>
           <a:solidFill>
-            <a:srgbClr val="8B5CF6"/>
+            <a:srgbClr val="3B968F"/>
           </a:solidFill>
           <a:ln/>
         </p:spPr>
@@ -3032,7 +3032,7 @@
             <a:r>
               <a:rPr lang="en-US" sz="1500" b="1" dirty="0">
                 <a:solidFill>
-                  <a:srgbClr val="0F1419"/>
+                  <a:srgbClr val="0F1214"/>
                 </a:solidFill>
                 <a:latin typeface="Calibri" pitchFamily="34" charset="0"/>
                 <a:ea typeface="Calibri" pitchFamily="34" charset="-122"/>
@@ -3100,7 +3100,7 @@
             </a:avLst>
           </a:prstGeom>
           <a:solidFill>
-            <a:srgbClr val="0F1419"/>
+            <a:srgbClr val="0F1214"/>
           </a:solidFill>
           <a:ln/>
         </p:spPr>
@@ -3122,7 +3122,7 @@
             </a:avLst>
           </a:prstGeom>
           <a:solidFill>
-            <a:srgbClr val="8B5CF6"/>
+            <a:srgbClr val="3B968F"/>
           </a:solidFill>
           <a:ln/>
         </p:spPr>
@@ -3136,7 +3136,7 @@
             <a:r>
               <a:rPr lang="en-US" sz="1500" b="1" dirty="0">
                 <a:solidFill>
-                  <a:srgbClr val="0F1419"/>
+                  <a:srgbClr val="0F1214"/>
                 </a:solidFill>
                 <a:latin typeface="Calibri" pitchFamily="34" charset="0"/>
                 <a:ea typeface="Calibri" pitchFamily="34" charset="-122"/>
@@ -3204,7 +3204,7 @@
             </a:avLst>
           </a:prstGeom>
           <a:solidFill>
-            <a:srgbClr val="0F1419"/>
+            <a:srgbClr val="0F1214"/>
           </a:solidFill>
           <a:ln/>
         </p:spPr>
@@ -3226,7 +3226,7 @@
             </a:avLst>
           </a:prstGeom>
           <a:solidFill>
-            <a:srgbClr val="8B5CF6"/>
+            <a:srgbClr val="3B968F"/>
           </a:solidFill>
           <a:ln/>
         </p:spPr>
@@ -3240,7 +3240,7 @@
             <a:r>
               <a:rPr lang="en-US" sz="1500" b="1" dirty="0">
                 <a:solidFill>
-                  <a:srgbClr val="0F1419"/>
+                  <a:srgbClr val="0F1214"/>
                 </a:solidFill>
                 <a:latin typeface="Calibri" pitchFamily="34" charset="0"/>
                 <a:ea typeface="Calibri" pitchFamily="34" charset="-122"/>
@@ -3308,7 +3308,7 @@
             </a:avLst>
           </a:prstGeom>
           <a:solidFill>
-            <a:srgbClr val="0F1419"/>
+            <a:srgbClr val="0F1214"/>
           </a:solidFill>
           <a:ln/>
         </p:spPr>
@@ -3330,7 +3330,7 @@
             </a:avLst>
           </a:prstGeom>
           <a:solidFill>
-            <a:srgbClr val="8B5CF6"/>
+            <a:srgbClr val="3B968F"/>
           </a:solidFill>
           <a:ln/>
         </p:spPr>
@@ -3344,7 +3344,7 @@
             <a:r>
               <a:rPr lang="en-US" sz="1500" b="1" dirty="0">
                 <a:solidFill>
-                  <a:srgbClr val="0F1419"/>
+                  <a:srgbClr val="0F1214"/>
                 </a:solidFill>
                 <a:latin typeface="Calibri" pitchFamily="34" charset="0"/>
                 <a:ea typeface="Calibri" pitchFamily="34" charset="-122"/>
@@ -3409,7 +3409,7 @@
     <p:bg>
       <p:bgPr>
         <a:solidFill>
-          <a:srgbClr val="0D2137"/>
+          <a:srgbClr val="12181D"/>
         </a:solidFill>
       </p:bgPr>
     </p:bg>
@@ -3490,7 +3490,7 @@
             <a:avLst/>
           </a:prstGeom>
           <a:solidFill>
-            <a:srgbClr val="8B5CF6">
+            <a:srgbClr val="3B968F">
               <a:alpha val="6000"/>
             </a:srgbClr>
           </a:solidFill>
@@ -3512,7 +3512,7 @@
             <a:avLst/>
           </a:prstGeom>
           <a:solidFill>
-            <a:srgbClr val="8B5CF6"/>
+            <a:srgbClr val="3B968F"/>
           </a:solidFill>
           <a:ln/>
         </p:spPr>
@@ -3544,7 +3544,7 @@
             <a:r>
               <a:rPr lang="en-US" sz="1200" b="1" spc="200" kern="0" dirty="0">
                 <a:solidFill>
-                  <a:srgbClr val="8B5CF6"/>
+                  <a:srgbClr val="3B968F"/>
                 </a:solidFill>
                 <a:latin typeface="Calibri" pitchFamily="34" charset="0"/>
                 <a:ea typeface="Calibri" pitchFamily="34" charset="-122"/>
@@ -3622,7 +3622,7 @@
             <a:r>
               <a:rPr lang="en-US" sz="1100" dirty="0">
                 <a:solidFill>
-                  <a:srgbClr val="64748B"/>
+                  <a:srgbClr val="5B6672"/>
                 </a:solidFill>
                 <a:latin typeface="Calibri" pitchFamily="34" charset="0"/>
                 <a:ea typeface="Calibri" pitchFamily="34" charset="-122"/>
@@ -3648,7 +3648,7 @@
     <p:bg>
       <p:bgPr>
         <a:solidFill>
-          <a:srgbClr val="0F1419"/>
+          <a:srgbClr val="0F1214"/>
         </a:solidFill>
       </p:bgPr>
     </p:bg>
@@ -3681,7 +3681,7 @@
             <a:avLst/>
           </a:prstGeom>
           <a:solidFill>
-            <a:srgbClr val="8B5CF6">
+            <a:srgbClr val="3B968F">
               <a:alpha val="12000"/>
             </a:srgbClr>
           </a:solidFill>
@@ -3908,7 +3908,7 @@
             <a:r>
               <a:rPr lang="en-US" sz="900" dirty="0">
                 <a:solidFill>
-                  <a:srgbClr val="64748B"/>
+                  <a:srgbClr val="5B6672"/>
                 </a:solidFill>
                 <a:latin typeface="Calibri" pitchFamily="34" charset="0"/>
                 <a:ea typeface="Calibri" pitchFamily="34" charset="-122"/>
@@ -3934,7 +3934,7 @@
     <p:bg>
       <p:bgPr>
         <a:solidFill>
-          <a:srgbClr val="0F1419"/>
+          <a:srgbClr val="0F1214"/>
         </a:solidFill>
       </p:bgPr>
     </p:bg>
@@ -4075,7 +4075,7 @@
             </a:avLst>
           </a:prstGeom>
           <a:solidFill>
-            <a:srgbClr val="1A2332"/>
+            <a:srgbClr val="1A2026"/>
           </a:solidFill>
           <a:ln/>
         </p:spPr>
@@ -4160,7 +4160,7 @@
             </a:avLst>
           </a:prstGeom>
           <a:solidFill>
-            <a:srgbClr val="1A2332"/>
+            <a:srgbClr val="1A2026"/>
           </a:solidFill>
           <a:ln/>
         </p:spPr>
@@ -4245,7 +4245,7 @@
             </a:avLst>
           </a:prstGeom>
           <a:solidFill>
-            <a:srgbClr val="1A2332"/>
+            <a:srgbClr val="1A2026"/>
           </a:solidFill>
           <a:ln/>
         </p:spPr>
@@ -4327,7 +4327,7 @@
     <p:bg>
       <p:bgPr>
         <a:solidFill>
-          <a:srgbClr val="1A2332"/>
+          <a:srgbClr val="1A2026"/>
         </a:solidFill>
       </p:bgPr>
     </p:bg>
@@ -4396,7 +4396,7 @@
             <a:r>
               <a:rPr lang="en-US" sz="1200" b="1" spc="300" kern="0" dirty="0">
                 <a:solidFill>
-                  <a:srgbClr val="F59E0B"/>
+                  <a:srgbClr val="5BC1B8"/>
                 </a:solidFill>
                 <a:latin typeface="Calibri" pitchFamily="34" charset="0"/>
                 <a:ea typeface="Calibri" pitchFamily="34" charset="-122"/>
@@ -4464,7 +4464,7 @@
             </a:avLst>
           </a:prstGeom>
           <a:solidFill>
-            <a:srgbClr val="0F1419"/>
+            <a:srgbClr val="0F1214"/>
           </a:solidFill>
           <a:ln/>
         </p:spPr>
@@ -4486,7 +4486,7 @@
             </a:avLst>
           </a:prstGeom>
           <a:solidFill>
-            <a:srgbClr val="8B5CF6"/>
+            <a:srgbClr val="3B968F"/>
           </a:solidFill>
           <a:ln/>
         </p:spPr>
@@ -4500,7 +4500,7 @@
             <a:r>
               <a:rPr lang="en-US" sz="1500" b="1" dirty="0">
                 <a:solidFill>
-                  <a:srgbClr val="0F1419"/>
+                  <a:srgbClr val="0F1214"/>
                 </a:solidFill>
                 <a:latin typeface="Calibri" pitchFamily="34" charset="0"/>
                 <a:ea typeface="Calibri" pitchFamily="34" charset="-122"/>
@@ -4568,7 +4568,7 @@
             </a:avLst>
           </a:prstGeom>
           <a:solidFill>
-            <a:srgbClr val="0F1419"/>
+            <a:srgbClr val="0F1214"/>
           </a:solidFill>
           <a:ln/>
         </p:spPr>
@@ -4590,7 +4590,7 @@
             </a:avLst>
           </a:prstGeom>
           <a:solidFill>
-            <a:srgbClr val="8B5CF6"/>
+            <a:srgbClr val="3B968F"/>
           </a:solidFill>
           <a:ln/>
         </p:spPr>
@@ -4604,7 +4604,7 @@
             <a:r>
               <a:rPr lang="en-US" sz="1500" b="1" dirty="0">
                 <a:solidFill>
-                  <a:srgbClr val="0F1419"/>
+                  <a:srgbClr val="0F1214"/>
                 </a:solidFill>
                 <a:latin typeface="Calibri" pitchFamily="34" charset="0"/>
                 <a:ea typeface="Calibri" pitchFamily="34" charset="-122"/>
@@ -4672,7 +4672,7 @@
             </a:avLst>
           </a:prstGeom>
           <a:solidFill>
-            <a:srgbClr val="0F1419"/>
+            <a:srgbClr val="0F1214"/>
           </a:solidFill>
           <a:ln/>
         </p:spPr>
@@ -4694,7 +4694,7 @@
             </a:avLst>
           </a:prstGeom>
           <a:solidFill>
-            <a:srgbClr val="8B5CF6"/>
+            <a:srgbClr val="3B968F"/>
           </a:solidFill>
           <a:ln/>
         </p:spPr>
@@ -4708,7 +4708,7 @@
             <a:r>
               <a:rPr lang="en-US" sz="1500" b="1" dirty="0">
                 <a:solidFill>
-                  <a:srgbClr val="0F1419"/>
+                  <a:srgbClr val="0F1214"/>
                 </a:solidFill>
                 <a:latin typeface="Calibri" pitchFamily="34" charset="0"/>
                 <a:ea typeface="Calibri" pitchFamily="34" charset="-122"/>
@@ -4776,7 +4776,7 @@
             </a:avLst>
           </a:prstGeom>
           <a:solidFill>
-            <a:srgbClr val="0F1419"/>
+            <a:srgbClr val="0F1214"/>
           </a:solidFill>
           <a:ln/>
         </p:spPr>
@@ -4798,7 +4798,7 @@
             </a:avLst>
           </a:prstGeom>
           <a:solidFill>
-            <a:srgbClr val="8B5CF6"/>
+            <a:srgbClr val="3B968F"/>
           </a:solidFill>
           <a:ln/>
         </p:spPr>
@@ -4812,7 +4812,7 @@
             <a:r>
               <a:rPr lang="en-US" sz="1500" b="1" dirty="0">
                 <a:solidFill>
-                  <a:srgbClr val="0F1419"/>
+                  <a:srgbClr val="0F1214"/>
                 </a:solidFill>
                 <a:latin typeface="Calibri" pitchFamily="34" charset="0"/>
                 <a:ea typeface="Calibri" pitchFamily="34" charset="-122"/>
@@ -4880,7 +4880,7 @@
             </a:avLst>
           </a:prstGeom>
           <a:solidFill>
-            <a:srgbClr val="0F1419"/>
+            <a:srgbClr val="0F1214"/>
           </a:solidFill>
           <a:ln/>
         </p:spPr>
@@ -4902,7 +4902,7 @@
             </a:avLst>
           </a:prstGeom>
           <a:solidFill>
-            <a:srgbClr val="8B5CF6"/>
+            <a:srgbClr val="3B968F"/>
           </a:solidFill>
           <a:ln/>
         </p:spPr>
@@ -4916,7 +4916,7 @@
             <a:r>
               <a:rPr lang="en-US" sz="1500" b="1" dirty="0">
                 <a:solidFill>
-                  <a:srgbClr val="0F1419"/>
+                  <a:srgbClr val="0F1214"/>
                 </a:solidFill>
                 <a:latin typeface="Calibri" pitchFamily="34" charset="0"/>
                 <a:ea typeface="Calibri" pitchFamily="34" charset="-122"/>
@@ -4981,7 +4981,7 @@
     <p:bg>
       <p:bgPr>
         <a:solidFill>
-          <a:srgbClr val="0D2137"/>
+          <a:srgbClr val="12181D"/>
         </a:solidFill>
       </p:bgPr>
     </p:bg>
@@ -5062,7 +5062,7 @@
             <a:avLst/>
           </a:prstGeom>
           <a:solidFill>
-            <a:srgbClr val="8B5CF6">
+            <a:srgbClr val="3B968F">
               <a:alpha val="6000"/>
             </a:srgbClr>
           </a:solidFill>
@@ -5084,7 +5084,7 @@
             <a:avLst/>
           </a:prstGeom>
           <a:solidFill>
-            <a:srgbClr val="8B5CF6"/>
+            <a:srgbClr val="3B968F"/>
           </a:solidFill>
           <a:ln/>
         </p:spPr>
@@ -5116,7 +5116,7 @@
             <a:r>
               <a:rPr lang="en-US" sz="1200" b="1" spc="200" kern="0" dirty="0">
                 <a:solidFill>
-                  <a:srgbClr val="8B5CF6"/>
+                  <a:srgbClr val="3B968F"/>
                 </a:solidFill>
                 <a:latin typeface="Calibri" pitchFamily="34" charset="0"/>
                 <a:ea typeface="Calibri" pitchFamily="34" charset="-122"/>
@@ -5194,7 +5194,7 @@
             <a:r>
               <a:rPr lang="en-US" sz="1100" dirty="0">
                 <a:solidFill>
-                  <a:srgbClr val="64748B"/>
+                  <a:srgbClr val="5B6672"/>
                 </a:solidFill>
                 <a:latin typeface="Calibri" pitchFamily="34" charset="0"/>
                 <a:ea typeface="Calibri" pitchFamily="34" charset="-122"/>
@@ -5220,7 +5220,7 @@
     <p:bg>
       <p:bgPr>
         <a:solidFill>
-          <a:srgbClr val="0F1419"/>
+          <a:srgbClr val="0F1214"/>
         </a:solidFill>
       </p:bgPr>
     </p:bg>
@@ -5253,7 +5253,7 @@
             <a:avLst/>
           </a:prstGeom>
           <a:solidFill>
-            <a:srgbClr val="8B5CF6">
+            <a:srgbClr val="3B968F">
               <a:alpha val="12000"/>
             </a:srgbClr>
           </a:solidFill>
@@ -5480,7 +5480,7 @@
             <a:r>
               <a:rPr lang="en-US" sz="900" dirty="0">
                 <a:solidFill>
-                  <a:srgbClr val="64748B"/>
+                  <a:srgbClr val="5B6672"/>
                 </a:solidFill>
                 <a:latin typeface="Calibri" pitchFamily="34" charset="0"/>
                 <a:ea typeface="Calibri" pitchFamily="34" charset="-122"/>
@@ -5506,7 +5506,7 @@
     <p:bg>
       <p:bgPr>
         <a:solidFill>
-          <a:srgbClr val="0F1419"/>
+          <a:srgbClr val="0F1214"/>
         </a:solidFill>
       </p:bgPr>
     </p:bg>
@@ -5647,7 +5647,7 @@
             </a:avLst>
           </a:prstGeom>
           <a:solidFill>
-            <a:srgbClr val="1A2332"/>
+            <a:srgbClr val="1A2026"/>
           </a:solidFill>
           <a:ln/>
         </p:spPr>
@@ -5732,7 +5732,7 @@
             </a:avLst>
           </a:prstGeom>
           <a:solidFill>
-            <a:srgbClr val="1A2332"/>
+            <a:srgbClr val="1A2026"/>
           </a:solidFill>
           <a:ln/>
         </p:spPr>
@@ -5817,7 +5817,7 @@
             </a:avLst>
           </a:prstGeom>
           <a:solidFill>
-            <a:srgbClr val="1A2332"/>
+            <a:srgbClr val="1A2026"/>
           </a:solidFill>
           <a:ln/>
         </p:spPr>
@@ -5899,7 +5899,7 @@
     <p:bg>
       <p:bgPr>
         <a:solidFill>
-          <a:srgbClr val="0F1419"/>
+          <a:srgbClr val="0F1214"/>
         </a:solidFill>
       </p:bgPr>
     </p:bg>
@@ -5932,7 +5932,7 @@
             <a:avLst/>
           </a:prstGeom>
           <a:solidFill>
-            <a:srgbClr val="8B5CF6">
+            <a:srgbClr val="3B968F">
               <a:alpha val="12000"/>
             </a:srgbClr>
           </a:solidFill>
@@ -6033,7 +6033,7 @@
             <a:r>
               <a:rPr lang="en-US" sz="900" dirty="0">
                 <a:solidFill>
-                  <a:srgbClr val="64748B"/>
+                  <a:srgbClr val="5B6672"/>
                 </a:solidFill>
                 <a:latin typeface="Calibri" pitchFamily="34" charset="0"/>
                 <a:ea typeface="Calibri" pitchFamily="34" charset="-122"/>
@@ -6059,7 +6059,7 @@
     <p:bg>
       <p:bgPr>
         <a:solidFill>
-          <a:srgbClr val="0F1419"/>
+          <a:srgbClr val="0F1214"/>
         </a:solidFill>
       </p:bgPr>
     </p:bg>
@@ -6092,7 +6092,7 @@
             <a:avLst/>
           </a:prstGeom>
           <a:solidFill>
-            <a:srgbClr val="8B5CF6">
+            <a:srgbClr val="3B968F">
               <a:alpha val="6000"/>
             </a:srgbClr>
           </a:solidFill>
@@ -6189,7 +6189,7 @@
             <a:r>
               <a:rPr lang="en-US" sz="1300" dirty="0">
                 <a:solidFill>
-                  <a:srgbClr val="94A3B8"/>
+                  <a:srgbClr val="8994A0"/>
                 </a:solidFill>
                 <a:latin typeface="Calibri" pitchFamily="34" charset="0"/>
                 <a:ea typeface="Calibri" pitchFamily="34" charset="-122"/>
@@ -6216,7 +6216,7 @@
             <a:avLst/>
           </a:prstGeom>
           <a:solidFill>
-            <a:srgbClr val="8B5CF6"/>
+            <a:srgbClr val="3B968F"/>
           </a:solidFill>
           <a:ln/>
         </p:spPr>
@@ -6248,7 +6248,7 @@
             <a:r>
               <a:rPr lang="en-US" sz="1100" spc="300" kern="0" dirty="0">
                 <a:solidFill>
-                  <a:srgbClr val="64748B"/>
+                  <a:srgbClr val="5B6672"/>
                 </a:solidFill>
                 <a:latin typeface="Calibri" pitchFamily="34" charset="0"/>
                 <a:ea typeface="Calibri" pitchFamily="34" charset="-122"/>
@@ -6287,7 +6287,7 @@
             <a:r>
               <a:rPr lang="en-US" sz="1100" dirty="0">
                 <a:solidFill>
-                  <a:srgbClr val="009E8B"/>
+                  <a:srgbClr val="000000"/>
                 </a:solidFill>
                 <a:latin typeface="Calibri" pitchFamily="34" charset="0"/>
                 <a:ea typeface="Calibri" pitchFamily="34" charset="-122"/>
@@ -6313,7 +6313,7 @@
     <p:bg>
       <p:bgPr>
         <a:solidFill>
-          <a:srgbClr val="0F1419"/>
+          <a:srgbClr val="0F1214"/>
         </a:solidFill>
       </p:bgPr>
     </p:bg>
@@ -6358,7 +6358,7 @@
             <a:r>
               <a:rPr lang="en-US" sz="1200" b="1" spc="300" kern="0" dirty="0">
                 <a:solidFill>
-                  <a:srgbClr val="8B5CF6"/>
+                  <a:srgbClr val="3B968F"/>
                 </a:solidFill>
                 <a:latin typeface="Calibri" pitchFamily="34" charset="0"/>
                 <a:ea typeface="Calibri" pitchFamily="34" charset="-122"/>
@@ -6426,7 +6426,7 @@
             </a:avLst>
           </a:prstGeom>
           <a:solidFill>
-            <a:srgbClr val="1A2332"/>
+            <a:srgbClr val="1A2026"/>
           </a:solidFill>
           <a:ln/>
         </p:spPr>
@@ -6458,7 +6458,7 @@
             <a:r>
               <a:rPr lang="en-US" sz="1300" b="1" dirty="0">
                 <a:solidFill>
-                  <a:srgbClr val="8B5CF6"/>
+                  <a:srgbClr val="3B968F"/>
                 </a:solidFill>
                 <a:latin typeface="Calibri" pitchFamily="34" charset="0"/>
                 <a:ea typeface="Calibri" pitchFamily="34" charset="-122"/>
@@ -6550,7 +6550,7 @@
             </a:avLst>
           </a:prstGeom>
           <a:solidFill>
-            <a:srgbClr val="1A2332"/>
+            <a:srgbClr val="1A2026"/>
           </a:solidFill>
           <a:ln/>
         </p:spPr>
@@ -6582,7 +6582,7 @@
             <a:r>
               <a:rPr lang="en-US" sz="1300" b="1" dirty="0">
                 <a:solidFill>
-                  <a:srgbClr val="8B5CF6"/>
+                  <a:srgbClr val="3B968F"/>
                 </a:solidFill>
                 <a:latin typeface="Calibri" pitchFamily="34" charset="0"/>
                 <a:ea typeface="Calibri" pitchFamily="34" charset="-122"/>
@@ -6674,7 +6674,7 @@
             </a:avLst>
           </a:prstGeom>
           <a:solidFill>
-            <a:srgbClr val="1A2332"/>
+            <a:srgbClr val="1A2026"/>
           </a:solidFill>
           <a:ln/>
         </p:spPr>
@@ -6706,7 +6706,7 @@
             <a:r>
               <a:rPr lang="en-US" sz="1300" b="1" dirty="0">
                 <a:solidFill>
-                  <a:srgbClr val="8B5CF6"/>
+                  <a:srgbClr val="3B968F"/>
                 </a:solidFill>
                 <a:latin typeface="Calibri" pitchFamily="34" charset="0"/>
                 <a:ea typeface="Calibri" pitchFamily="34" charset="-122"/>
@@ -6798,7 +6798,7 @@
             </a:avLst>
           </a:prstGeom>
           <a:solidFill>
-            <a:srgbClr val="1A2332"/>
+            <a:srgbClr val="1A2026"/>
           </a:solidFill>
           <a:ln/>
         </p:spPr>
@@ -6830,7 +6830,7 @@
             <a:r>
               <a:rPr lang="en-US" sz="1300" b="1" dirty="0">
                 <a:solidFill>
-                  <a:srgbClr val="8B5CF6"/>
+                  <a:srgbClr val="3B968F"/>
                 </a:solidFill>
                 <a:latin typeface="Calibri" pitchFamily="34" charset="0"/>
                 <a:ea typeface="Calibri" pitchFamily="34" charset="-122"/>
@@ -6919,7 +6919,7 @@
     <p:bg>
       <p:bgPr>
         <a:solidFill>
-          <a:srgbClr val="0D2137"/>
+          <a:srgbClr val="12181D"/>
         </a:solidFill>
       </p:bgPr>
     </p:bg>
@@ -7000,7 +7000,7 @@
             <a:avLst/>
           </a:prstGeom>
           <a:solidFill>
-            <a:srgbClr val="8B5CF6">
+            <a:srgbClr val="3B968F">
               <a:alpha val="6000"/>
             </a:srgbClr>
           </a:solidFill>
@@ -7022,7 +7022,7 @@
             <a:avLst/>
           </a:prstGeom>
           <a:solidFill>
-            <a:srgbClr val="8B5CF6"/>
+            <a:srgbClr val="3B968F"/>
           </a:solidFill>
           <a:ln/>
         </p:spPr>
@@ -7054,7 +7054,7 @@
             <a:r>
               <a:rPr lang="en-US" sz="1200" b="1" spc="200" kern="0" dirty="0">
                 <a:solidFill>
-                  <a:srgbClr val="8B5CF6"/>
+                  <a:srgbClr val="3B968F"/>
                 </a:solidFill>
                 <a:latin typeface="Calibri" pitchFamily="34" charset="0"/>
                 <a:ea typeface="Calibri" pitchFamily="34" charset="-122"/>
@@ -7132,7 +7132,7 @@
             <a:r>
               <a:rPr lang="en-US" sz="1100" dirty="0">
                 <a:solidFill>
-                  <a:srgbClr val="64748B"/>
+                  <a:srgbClr val="5B6672"/>
                 </a:solidFill>
                 <a:latin typeface="Calibri" pitchFamily="34" charset="0"/>
                 <a:ea typeface="Calibri" pitchFamily="34" charset="-122"/>
@@ -7158,7 +7158,7 @@
     <p:bg>
       <p:bgPr>
         <a:solidFill>
-          <a:srgbClr val="0F1419"/>
+          <a:srgbClr val="0F1214"/>
         </a:solidFill>
       </p:bgPr>
     </p:bg>
@@ -7191,7 +7191,7 @@
             <a:avLst/>
           </a:prstGeom>
           <a:solidFill>
-            <a:srgbClr val="8B5CF6">
+            <a:srgbClr val="3B968F">
               <a:alpha val="12000"/>
             </a:srgbClr>
           </a:solidFill>
@@ -7418,7 +7418,7 @@
             <a:r>
               <a:rPr lang="en-US" sz="900" dirty="0">
                 <a:solidFill>
-                  <a:srgbClr val="64748B"/>
+                  <a:srgbClr val="5B6672"/>
                 </a:solidFill>
                 <a:latin typeface="Calibri" pitchFamily="34" charset="0"/>
                 <a:ea typeface="Calibri" pitchFamily="34" charset="-122"/>
@@ -7444,7 +7444,7 @@
     <p:bg>
       <p:bgPr>
         <a:solidFill>
-          <a:srgbClr val="0F1419"/>
+          <a:srgbClr val="0F1214"/>
         </a:solidFill>
       </p:bgPr>
     </p:bg>
@@ -7543,7 +7543,7 @@
             </a:avLst>
           </a:prstGeom>
           <a:solidFill>
-            <a:srgbClr val="1A2332"/>
+            <a:srgbClr val="1A2026"/>
           </a:solidFill>
           <a:ln/>
         </p:spPr>
@@ -7628,7 +7628,7 @@
             </a:avLst>
           </a:prstGeom>
           <a:solidFill>
-            <a:srgbClr val="1A2332"/>
+            <a:srgbClr val="1A2026"/>
           </a:solidFill>
           <a:ln/>
         </p:spPr>
@@ -7710,7 +7710,7 @@
     <p:bg>
       <p:bgPr>
         <a:solidFill>
-          <a:srgbClr val="1A2332"/>
+          <a:srgbClr val="1A2026"/>
         </a:solidFill>
       </p:bgPr>
     </p:bg>
@@ -7779,7 +7779,7 @@
             <a:r>
               <a:rPr lang="en-US" sz="1200" b="1" spc="300" kern="0" dirty="0">
                 <a:solidFill>
-                  <a:srgbClr val="F59E0B"/>
+                  <a:srgbClr val="5BC1B8"/>
                 </a:solidFill>
                 <a:latin typeface="Calibri" pitchFamily="34" charset="0"/>
                 <a:ea typeface="Calibri" pitchFamily="34" charset="-122"/>
@@ -7847,7 +7847,7 @@
             </a:avLst>
           </a:prstGeom>
           <a:solidFill>
-            <a:srgbClr val="0F1419"/>
+            <a:srgbClr val="0F1214"/>
           </a:solidFill>
           <a:ln/>
         </p:spPr>
@@ -7869,7 +7869,7 @@
             </a:avLst>
           </a:prstGeom>
           <a:solidFill>
-            <a:srgbClr val="8B5CF6"/>
+            <a:srgbClr val="3B968F"/>
           </a:solidFill>
           <a:ln/>
         </p:spPr>
@@ -7883,7 +7883,7 @@
             <a:r>
               <a:rPr lang="en-US" sz="1500" b="1" dirty="0">
                 <a:solidFill>
-                  <a:srgbClr val="0F1419"/>
+                  <a:srgbClr val="0F1214"/>
                 </a:solidFill>
                 <a:latin typeface="Calibri" pitchFamily="34" charset="0"/>
                 <a:ea typeface="Calibri" pitchFamily="34" charset="-122"/>
@@ -7951,7 +7951,7 @@
             </a:avLst>
           </a:prstGeom>
           <a:solidFill>
-            <a:srgbClr val="0F1419"/>
+            <a:srgbClr val="0F1214"/>
           </a:solidFill>
           <a:ln/>
         </p:spPr>
@@ -7973,7 +7973,7 @@
             </a:avLst>
           </a:prstGeom>
           <a:solidFill>
-            <a:srgbClr val="8B5CF6"/>
+            <a:srgbClr val="3B968F"/>
           </a:solidFill>
           <a:ln/>
         </p:spPr>
@@ -7987,7 +7987,7 @@
             <a:r>
               <a:rPr lang="en-US" sz="1500" b="1" dirty="0">
                 <a:solidFill>
-                  <a:srgbClr val="0F1419"/>
+                  <a:srgbClr val="0F1214"/>
                 </a:solidFill>
                 <a:latin typeface="Calibri" pitchFamily="34" charset="0"/>
                 <a:ea typeface="Calibri" pitchFamily="34" charset="-122"/>
@@ -8055,7 +8055,7 @@
             </a:avLst>
           </a:prstGeom>
           <a:solidFill>
-            <a:srgbClr val="0F1419"/>
+            <a:srgbClr val="0F1214"/>
           </a:solidFill>
           <a:ln/>
         </p:spPr>
@@ -8077,7 +8077,7 @@
             </a:avLst>
           </a:prstGeom>
           <a:solidFill>
-            <a:srgbClr val="8B5CF6"/>
+            <a:srgbClr val="3B968F"/>
           </a:solidFill>
           <a:ln/>
         </p:spPr>
@@ -8091,7 +8091,7 @@
             <a:r>
               <a:rPr lang="en-US" sz="1500" b="1" dirty="0">
                 <a:solidFill>
-                  <a:srgbClr val="0F1419"/>
+                  <a:srgbClr val="0F1214"/>
                 </a:solidFill>
                 <a:latin typeface="Calibri" pitchFamily="34" charset="0"/>
                 <a:ea typeface="Calibri" pitchFamily="34" charset="-122"/>
@@ -8159,7 +8159,7 @@
             </a:avLst>
           </a:prstGeom>
           <a:solidFill>
-            <a:srgbClr val="0F1419"/>
+            <a:srgbClr val="0F1214"/>
           </a:solidFill>
           <a:ln/>
         </p:spPr>
@@ -8181,7 +8181,7 @@
             </a:avLst>
           </a:prstGeom>
           <a:solidFill>
-            <a:srgbClr val="8B5CF6"/>
+            <a:srgbClr val="3B968F"/>
           </a:solidFill>
           <a:ln/>
         </p:spPr>
@@ -8195,7 +8195,7 @@
             <a:r>
               <a:rPr lang="en-US" sz="1500" b="1" dirty="0">
                 <a:solidFill>
-                  <a:srgbClr val="0F1419"/>
+                  <a:srgbClr val="0F1214"/>
                 </a:solidFill>
                 <a:latin typeface="Calibri" pitchFamily="34" charset="0"/>
                 <a:ea typeface="Calibri" pitchFamily="34" charset="-122"/>
@@ -8263,7 +8263,7 @@
             </a:avLst>
           </a:prstGeom>
           <a:solidFill>
-            <a:srgbClr val="0F1419"/>
+            <a:srgbClr val="0F1214"/>
           </a:solidFill>
           <a:ln/>
         </p:spPr>
@@ -8285,7 +8285,7 @@
             </a:avLst>
           </a:prstGeom>
           <a:solidFill>
-            <a:srgbClr val="8B5CF6"/>
+            <a:srgbClr val="3B968F"/>
           </a:solidFill>
           <a:ln/>
         </p:spPr>
@@ -8299,7 +8299,7 @@
             <a:r>
               <a:rPr lang="en-US" sz="1500" b="1" dirty="0">
                 <a:solidFill>
-                  <a:srgbClr val="0F1419"/>
+                  <a:srgbClr val="0F1214"/>
                 </a:solidFill>
                 <a:latin typeface="Calibri" pitchFamily="34" charset="0"/>
                 <a:ea typeface="Calibri" pitchFamily="34" charset="-122"/>
@@ -8364,7 +8364,7 @@
     <p:bg>
       <p:bgPr>
         <a:solidFill>
-          <a:srgbClr val="0D2137"/>
+          <a:srgbClr val="12181D"/>
         </a:solidFill>
       </p:bgPr>
     </p:bg>
@@ -8445,7 +8445,7 @@
             <a:avLst/>
           </a:prstGeom>
           <a:solidFill>
-            <a:srgbClr val="8B5CF6">
+            <a:srgbClr val="3B968F">
               <a:alpha val="6000"/>
             </a:srgbClr>
           </a:solidFill>
@@ -8467,7 +8467,7 @@
             <a:avLst/>
           </a:prstGeom>
           <a:solidFill>
-            <a:srgbClr val="8B5CF6"/>
+            <a:srgbClr val="3B968F"/>
           </a:solidFill>
           <a:ln/>
         </p:spPr>
@@ -8499,7 +8499,7 @@
             <a:r>
               <a:rPr lang="en-US" sz="1200" b="1" spc="200" kern="0" dirty="0">
                 <a:solidFill>
-                  <a:srgbClr val="8B5CF6"/>
+                  <a:srgbClr val="3B968F"/>
                 </a:solidFill>
                 <a:latin typeface="Calibri" pitchFamily="34" charset="0"/>
                 <a:ea typeface="Calibri" pitchFamily="34" charset="-122"/>
@@ -8577,7 +8577,7 @@
             <a:r>
               <a:rPr lang="en-US" sz="1100" dirty="0">
                 <a:solidFill>
-                  <a:srgbClr val="64748B"/>
+                  <a:srgbClr val="5B6672"/>
                 </a:solidFill>
                 <a:latin typeface="Calibri" pitchFamily="34" charset="0"/>
                 <a:ea typeface="Calibri" pitchFamily="34" charset="-122"/>
@@ -8603,7 +8603,7 @@
     <p:bg>
       <p:bgPr>
         <a:solidFill>
-          <a:srgbClr val="0F1419"/>
+          <a:srgbClr val="0F1214"/>
         </a:solidFill>
       </p:bgPr>
     </p:bg>
@@ -8636,7 +8636,7 @@
             <a:avLst/>
           </a:prstGeom>
           <a:solidFill>
-            <a:srgbClr val="8B5CF6">
+            <a:srgbClr val="3B968F">
               <a:alpha val="12000"/>
             </a:srgbClr>
           </a:solidFill>
@@ -8842,7 +8842,7 @@
             <a:r>
               <a:rPr lang="en-US" sz="900" dirty="0">
                 <a:solidFill>
-                  <a:srgbClr val="64748B"/>
+                  <a:srgbClr val="5B6672"/>
                 </a:solidFill>
                 <a:latin typeface="Calibri" pitchFamily="34" charset="0"/>
                 <a:ea typeface="Calibri" pitchFamily="34" charset="-122"/>
@@ -8868,7 +8868,7 @@
     <p:bg>
       <p:bgPr>
         <a:solidFill>
-          <a:srgbClr val="0F1419"/>
+          <a:srgbClr val="0F1214"/>
         </a:solidFill>
       </p:bgPr>
     </p:bg>
@@ -8913,7 +8913,7 @@
             <a:r>
               <a:rPr lang="en-US" sz="2000" b="1" dirty="0">
                 <a:solidFill>
-                  <a:srgbClr val="8B5CF6"/>
+                  <a:srgbClr val="3B968F"/>
                 </a:solidFill>
                 <a:latin typeface="Calibri" pitchFamily="34" charset="0"/>
                 <a:ea typeface="Calibri" pitchFamily="34" charset="-122"/>
@@ -9027,7 +9027,7 @@
             </a:avLst>
           </a:prstGeom>
           <a:solidFill>
-            <a:srgbClr val="1A2332"/>
+            <a:srgbClr val="1A2026"/>
           </a:solidFill>
           <a:ln/>
         </p:spPr>
@@ -9112,7 +9112,7 @@
             </a:avLst>
           </a:prstGeom>
           <a:solidFill>
-            <a:srgbClr val="1A2332"/>
+            <a:srgbClr val="1A2026"/>
           </a:solidFill>
           <a:ln/>
         </p:spPr>
